--- a/Documents/Original/FlexChroma_Blend_Color_Checker-JP.pptx
+++ b/Documents/Original/FlexChroma_Blend_Color_Checker-JP.pptx
@@ -266,6 +266,11 @@
       </a:defRPr>
     </a:lvl9pPr>
   </p:defaultTextStyle>
+  <p:extLst>
+    <p:ext uri="{EFAFB233-063F-42B5-8137-9DF3F51BA10A}">
+      <p15:sldGuideLst xmlns:p15="http://schemas.microsoft.com/office/powerpoint/2012/main"/>
+    </p:ext>
+  </p:extLst>
 </p:presentation>
 </file>
 
@@ -12620,8 +12625,8 @@
         </p:nvSpPr>
         <p:spPr>
           <a:xfrm>
-            <a:off x="0" y="0"/>
-            <a:ext cx="6858000" cy="9144000"/>
+            <a:off x="33951" y="45268"/>
+            <a:ext cx="6790099" cy="9053465"/>
           </a:xfrm>
           <a:prstGeom prst="rect">
             <a:avLst/>
@@ -12691,7 +12696,7 @@
         </p:nvSpPr>
         <p:spPr>
           <a:xfrm>
-            <a:off x="7269" y="3681"/>
+            <a:off x="1177" y="-1"/>
             <a:ext cx="6858000" cy="9144000"/>
           </a:xfrm>
           <a:prstGeom prst="rect">
@@ -15189,8 +15194,8 @@
         </p:nvSpPr>
         <p:spPr>
           <a:xfrm>
-            <a:off x="0" y="0"/>
-            <a:ext cx="6858000" cy="9144000"/>
+            <a:off x="33951" y="45268"/>
+            <a:ext cx="6790099" cy="9053465"/>
           </a:xfrm>
           <a:prstGeom prst="rect">
             <a:avLst/>
@@ -15254,7 +15259,7 @@
         </p:nvSpPr>
         <p:spPr>
           <a:xfrm>
-            <a:off x="7269" y="0"/>
+            <a:off x="-7269" y="-1"/>
             <a:ext cx="6858000" cy="9144000"/>
           </a:xfrm>
           <a:prstGeom prst="rect">
@@ -20712,8 +20717,8 @@
         </p:nvSpPr>
         <p:spPr>
           <a:xfrm>
-            <a:off x="0" y="0"/>
-            <a:ext cx="6858000" cy="9144000"/>
+            <a:off x="33951" y="45268"/>
+            <a:ext cx="6790099" cy="9053465"/>
           </a:xfrm>
           <a:prstGeom prst="rect">
             <a:avLst/>
@@ -20783,7 +20788,7 @@
         </p:nvSpPr>
         <p:spPr>
           <a:xfrm>
-            <a:off x="1890" y="-1698"/>
+            <a:off x="0" y="0"/>
             <a:ext cx="6858000" cy="9144000"/>
           </a:xfrm>
           <a:custGeom>
@@ -23041,8 +23046,8 @@
         </p:nvSpPr>
         <p:spPr>
           <a:xfrm>
-            <a:off x="0" y="0"/>
-            <a:ext cx="6858000" cy="9144000"/>
+            <a:off x="33951" y="45268"/>
+            <a:ext cx="6790099" cy="9053465"/>
           </a:xfrm>
           <a:prstGeom prst="rect">
             <a:avLst/>
@@ -23112,7 +23117,7 @@
         </p:nvSpPr>
         <p:spPr>
           <a:xfrm>
-            <a:off x="1890" y="0"/>
+            <a:off x="0" y="0"/>
             <a:ext cx="6858000" cy="9144000"/>
           </a:xfrm>
           <a:custGeom>

--- a/Documents/Original/FlexChroma_Blend_Color_Checker-JP.pptx
+++ b/Documents/Original/FlexChroma_Blend_Color_Checker-JP.pptx
@@ -16329,7 +16329,7 @@
               <a:buAutoNum type="arabicPeriod"/>
             </a:pPr>
             <a:r>
-              <a:rPr lang="en-US" sz="1000">
+              <a:rPr lang="en-US" sz="1000" dirty="0">
                 <a:solidFill>
                   <a:schemeClr val="dk1"/>
                 </a:solidFill>
@@ -16340,7 +16340,7 @@
               </a:rPr>
               <a:t>欲しい色を実現できそうな2色のフィラメントを選定する </a:t>
             </a:r>
-            <a:endParaRPr sz="1000">
+            <a:endParaRPr sz="1000" dirty="0">
               <a:solidFill>
                 <a:schemeClr val="dk1"/>
               </a:solidFill>
@@ -16369,18 +16369,42 @@
               <a:buAutoNum type="arabicPeriod"/>
             </a:pPr>
             <a:r>
-              <a:rPr lang="en-US" sz="1000">
-                <a:solidFill>
-                  <a:schemeClr val="dk1"/>
-                </a:solidFill>
-                <a:latin typeface="IBM Plex Sans JP" panose="020B0503050203000203" pitchFamily="50" charset="-128"/>
-                <a:ea typeface="IBM Plex Sans JP" panose="020B0503050203000203" pitchFamily="50" charset="-128"/>
-                <a:cs typeface="IBM Plex Sans JP"/>
-                <a:sym typeface="IBM Plex Sans JP"/>
-              </a:rPr>
-              <a:t>1のフィラメントを用いてCheck Filament を印刷する </a:t>
-            </a:r>
-            <a:endParaRPr sz="1000">
+              <a:rPr lang="en-US" sz="1000" dirty="0">
+                <a:solidFill>
+                  <a:schemeClr val="dk1"/>
+                </a:solidFill>
+                <a:latin typeface="IBM Plex Sans JP" panose="020B0503050203000203" pitchFamily="50" charset="-128"/>
+                <a:ea typeface="IBM Plex Sans JP" panose="020B0503050203000203" pitchFamily="50" charset="-128"/>
+                <a:cs typeface="IBM Plex Sans JP"/>
+                <a:sym typeface="IBM Plex Sans JP"/>
+              </a:rPr>
+              <a:t>1のフィラメントを用いてCheck Filament </a:t>
+            </a:r>
+            <a:r>
+              <a:rPr lang="en-US" sz="1000" dirty="0" err="1">
+                <a:solidFill>
+                  <a:schemeClr val="dk1"/>
+                </a:solidFill>
+                <a:latin typeface="IBM Plex Sans JP" panose="020B0503050203000203" pitchFamily="50" charset="-128"/>
+                <a:ea typeface="IBM Plex Sans JP" panose="020B0503050203000203" pitchFamily="50" charset="-128"/>
+                <a:cs typeface="IBM Plex Sans JP"/>
+                <a:sym typeface="IBM Plex Sans JP"/>
+              </a:rPr>
+              <a:t>を印刷する</a:t>
+            </a:r>
+            <a:r>
+              <a:rPr lang="en-US" sz="1000" dirty="0">
+                <a:solidFill>
+                  <a:schemeClr val="dk1"/>
+                </a:solidFill>
+                <a:latin typeface="IBM Plex Sans JP" panose="020B0503050203000203" pitchFamily="50" charset="-128"/>
+                <a:ea typeface="IBM Plex Sans JP" panose="020B0503050203000203" pitchFamily="50" charset="-128"/>
+                <a:cs typeface="IBM Plex Sans JP"/>
+                <a:sym typeface="IBM Plex Sans JP"/>
+              </a:rPr>
+              <a:t> </a:t>
+            </a:r>
+            <a:endParaRPr sz="1000" dirty="0">
               <a:solidFill>
                 <a:schemeClr val="dk1"/>
               </a:solidFill>
@@ -16409,18 +16433,66 @@
               <a:buAutoNum type="arabicPeriod"/>
             </a:pPr>
             <a:r>
-              <a:rPr lang="en-US" sz="1000">
-                <a:solidFill>
-                  <a:schemeClr val="dk1"/>
-                </a:solidFill>
-                <a:latin typeface="IBM Plex Sans JP" panose="020B0503050203000203" pitchFamily="50" charset="-128"/>
-                <a:ea typeface="IBM Plex Sans JP" panose="020B0503050203000203" pitchFamily="50" charset="-128"/>
-                <a:cs typeface="IBM Plex Sans JP"/>
-                <a:sym typeface="IBM Plex Sans JP"/>
-              </a:rPr>
-              <a:t>Check Filament によってCheck Tower を印刷し、求める色に近いう混合比を確認する </a:t>
-            </a:r>
-            <a:endParaRPr sz="1000">
+              <a:rPr lang="en-US" sz="1000" dirty="0">
+                <a:solidFill>
+                  <a:schemeClr val="dk1"/>
+                </a:solidFill>
+                <a:latin typeface="IBM Plex Sans JP" panose="020B0503050203000203" pitchFamily="50" charset="-128"/>
+                <a:ea typeface="IBM Plex Sans JP" panose="020B0503050203000203" pitchFamily="50" charset="-128"/>
+                <a:cs typeface="IBM Plex Sans JP"/>
+                <a:sym typeface="IBM Plex Sans JP"/>
+              </a:rPr>
+              <a:t>Check Filament </a:t>
+            </a:r>
+            <a:r>
+              <a:rPr lang="en-US" sz="1000" dirty="0" err="1">
+                <a:solidFill>
+                  <a:schemeClr val="dk1"/>
+                </a:solidFill>
+                <a:latin typeface="IBM Plex Sans JP" panose="020B0503050203000203" pitchFamily="50" charset="-128"/>
+                <a:ea typeface="IBM Plex Sans JP" panose="020B0503050203000203" pitchFamily="50" charset="-128"/>
+                <a:cs typeface="IBM Plex Sans JP"/>
+                <a:sym typeface="IBM Plex Sans JP"/>
+              </a:rPr>
+              <a:t>によってCheck</a:t>
+            </a:r>
+            <a:r>
+              <a:rPr lang="en-US" sz="1000" dirty="0">
+                <a:solidFill>
+                  <a:schemeClr val="dk1"/>
+                </a:solidFill>
+                <a:latin typeface="IBM Plex Sans JP" panose="020B0503050203000203" pitchFamily="50" charset="-128"/>
+                <a:ea typeface="IBM Plex Sans JP" panose="020B0503050203000203" pitchFamily="50" charset="-128"/>
+                <a:cs typeface="IBM Plex Sans JP"/>
+                <a:sym typeface="IBM Plex Sans JP"/>
+              </a:rPr>
+              <a:t> Tower </a:t>
+            </a:r>
+            <a:r>
+              <a:rPr lang="en-US" sz="1000" dirty="0" err="1">
+                <a:solidFill>
+                  <a:schemeClr val="dk1"/>
+                </a:solidFill>
+                <a:latin typeface="IBM Plex Sans JP" panose="020B0503050203000203" pitchFamily="50" charset="-128"/>
+                <a:ea typeface="IBM Plex Sans JP" panose="020B0503050203000203" pitchFamily="50" charset="-128"/>
+                <a:cs typeface="IBM Plex Sans JP"/>
+                <a:sym typeface="IBM Plex Sans JP"/>
+              </a:rPr>
+              <a:t>を印刷し、求める色に近い混合比を確認する</a:t>
+            </a:r>
+            <a:r>
+              <a:rPr lang="en-US" sz="1000" dirty="0">
+                <a:solidFill>
+                  <a:schemeClr val="dk1"/>
+                </a:solidFill>
+                <a:latin typeface="IBM Plex Sans JP" panose="020B0503050203000203" pitchFamily="50" charset="-128"/>
+                <a:ea typeface="IBM Plex Sans JP" panose="020B0503050203000203" pitchFamily="50" charset="-128"/>
+                <a:cs typeface="IBM Plex Sans JP"/>
+                <a:sym typeface="IBM Plex Sans JP"/>
+              </a:rPr>
+              <a:t> </a:t>
+            </a:r>
+            <a:endParaRPr sz="1000" dirty="0">
               <a:solidFill>
                 <a:schemeClr val="dk1"/>
               </a:solidFill>
@@ -16449,18 +16521,30 @@
               <a:buAutoNum type="arabicPeriod"/>
             </a:pPr>
             <a:r>
-              <a:rPr lang="en-US" sz="1000">
-                <a:solidFill>
-                  <a:schemeClr val="dk1"/>
-                </a:solidFill>
-                <a:latin typeface="IBM Plex Sans JP" panose="020B0503050203000203" pitchFamily="50" charset="-128"/>
-                <a:ea typeface="IBM Plex Sans JP" panose="020B0503050203000203" pitchFamily="50" charset="-128"/>
-                <a:cs typeface="IBM Plex Sans JP"/>
-                <a:sym typeface="IBM Plex Sans JP"/>
-              </a:rPr>
-              <a:t>必要に応じ ３の混合比のS4モデルを印刷し近似形状をテストプリントする </a:t>
-            </a:r>
-            <a:endParaRPr sz="1000">
+              <a:rPr lang="en-US" sz="1000" dirty="0" err="1">
+                <a:solidFill>
+                  <a:schemeClr val="dk1"/>
+                </a:solidFill>
+                <a:latin typeface="IBM Plex Sans JP" panose="020B0503050203000203" pitchFamily="50" charset="-128"/>
+                <a:ea typeface="IBM Plex Sans JP" panose="020B0503050203000203" pitchFamily="50" charset="-128"/>
+                <a:cs typeface="IBM Plex Sans JP"/>
+                <a:sym typeface="IBM Plex Sans JP"/>
+              </a:rPr>
+              <a:t>必要に応じ</a:t>
+            </a:r>
+            <a:r>
+              <a:rPr lang="en-US" sz="1000" dirty="0">
+                <a:solidFill>
+                  <a:schemeClr val="dk1"/>
+                </a:solidFill>
+                <a:latin typeface="IBM Plex Sans JP" panose="020B0503050203000203" pitchFamily="50" charset="-128"/>
+                <a:ea typeface="IBM Plex Sans JP" panose="020B0503050203000203" pitchFamily="50" charset="-128"/>
+                <a:cs typeface="IBM Plex Sans JP"/>
+                <a:sym typeface="IBM Plex Sans JP"/>
+              </a:rPr>
+              <a:t> ３の混合比のS4モデルを印刷し近似形状をテストプリントする </a:t>
+            </a:r>
+            <a:endParaRPr sz="1000" dirty="0">
               <a:solidFill>
                 <a:schemeClr val="dk1"/>
               </a:solidFill>
@@ -16489,18 +16573,78 @@
               <a:buAutoNum type="arabicPeriod"/>
             </a:pPr>
             <a:r>
-              <a:rPr lang="en-US" sz="1000">
-                <a:solidFill>
-                  <a:schemeClr val="dk1"/>
-                </a:solidFill>
-                <a:latin typeface="IBM Plex Sans JP" panose="020B0503050203000203" pitchFamily="50" charset="-128"/>
-                <a:ea typeface="IBM Plex Sans JP" panose="020B0503050203000203" pitchFamily="50" charset="-128"/>
-                <a:cs typeface="IBM Plex Sans JP"/>
-                <a:sym typeface="IBM Plex Sans JP"/>
-              </a:rPr>
-              <a:t>問題なければ 必要量の Blend Filament を生成する </a:t>
-            </a:r>
-            <a:endParaRPr sz="1000" b="1">
+              <a:rPr lang="en-US" sz="1000" dirty="0" err="1">
+                <a:solidFill>
+                  <a:schemeClr val="dk1"/>
+                </a:solidFill>
+                <a:latin typeface="IBM Plex Sans JP" panose="020B0503050203000203" pitchFamily="50" charset="-128"/>
+                <a:ea typeface="IBM Plex Sans JP" panose="020B0503050203000203" pitchFamily="50" charset="-128"/>
+                <a:cs typeface="IBM Plex Sans JP"/>
+                <a:sym typeface="IBM Plex Sans JP"/>
+              </a:rPr>
+              <a:t>問題なければ</a:t>
+            </a:r>
+            <a:r>
+              <a:rPr lang="en-US" sz="1000" dirty="0">
+                <a:solidFill>
+                  <a:schemeClr val="dk1"/>
+                </a:solidFill>
+                <a:latin typeface="IBM Plex Sans JP" panose="020B0503050203000203" pitchFamily="50" charset="-128"/>
+                <a:ea typeface="IBM Plex Sans JP" panose="020B0503050203000203" pitchFamily="50" charset="-128"/>
+                <a:cs typeface="IBM Plex Sans JP"/>
+                <a:sym typeface="IBM Plex Sans JP"/>
+              </a:rPr>
+              <a:t> </a:t>
+            </a:r>
+            <a:r>
+              <a:rPr lang="en-US" sz="1000" dirty="0" err="1">
+                <a:solidFill>
+                  <a:schemeClr val="dk1"/>
+                </a:solidFill>
+                <a:latin typeface="IBM Plex Sans JP" panose="020B0503050203000203" pitchFamily="50" charset="-128"/>
+                <a:ea typeface="IBM Plex Sans JP" panose="020B0503050203000203" pitchFamily="50" charset="-128"/>
+                <a:cs typeface="IBM Plex Sans JP"/>
+                <a:sym typeface="IBM Plex Sans JP"/>
+              </a:rPr>
+              <a:t>必要量の</a:t>
+            </a:r>
+            <a:r>
+              <a:rPr lang="en-US" sz="1000" dirty="0">
+                <a:solidFill>
+                  <a:schemeClr val="dk1"/>
+                </a:solidFill>
+                <a:latin typeface="IBM Plex Sans JP" panose="020B0503050203000203" pitchFamily="50" charset="-128"/>
+                <a:ea typeface="IBM Plex Sans JP" panose="020B0503050203000203" pitchFamily="50" charset="-128"/>
+                <a:cs typeface="IBM Plex Sans JP"/>
+                <a:sym typeface="IBM Plex Sans JP"/>
+              </a:rPr>
+              <a:t> Blend Filament </a:t>
+            </a:r>
+            <a:r>
+              <a:rPr lang="en-US" sz="1000" dirty="0" err="1">
+                <a:solidFill>
+                  <a:schemeClr val="dk1"/>
+                </a:solidFill>
+                <a:latin typeface="IBM Plex Sans JP" panose="020B0503050203000203" pitchFamily="50" charset="-128"/>
+                <a:ea typeface="IBM Plex Sans JP" panose="020B0503050203000203" pitchFamily="50" charset="-128"/>
+                <a:cs typeface="IBM Plex Sans JP"/>
+                <a:sym typeface="IBM Plex Sans JP"/>
+              </a:rPr>
+              <a:t>を生成する</a:t>
+            </a:r>
+            <a:r>
+              <a:rPr lang="en-US" sz="1000" dirty="0">
+                <a:solidFill>
+                  <a:schemeClr val="dk1"/>
+                </a:solidFill>
+                <a:latin typeface="IBM Plex Sans JP" panose="020B0503050203000203" pitchFamily="50" charset="-128"/>
+                <a:ea typeface="IBM Plex Sans JP" panose="020B0503050203000203" pitchFamily="50" charset="-128"/>
+                <a:cs typeface="IBM Plex Sans JP"/>
+                <a:sym typeface="IBM Plex Sans JP"/>
+              </a:rPr>
+              <a:t> </a:t>
+            </a:r>
+            <a:endParaRPr sz="1000" b="1" dirty="0">
               <a:solidFill>
                 <a:schemeClr val="dk1"/>
               </a:solidFill>
@@ -24020,7 +24164,7 @@
               <a:buAutoNum type="arabicPeriod"/>
             </a:pPr>
             <a:r>
-              <a:rPr lang="en-US" sz="1000">
+              <a:rPr lang="en-US" sz="1000" dirty="0">
                 <a:solidFill>
                   <a:schemeClr val="dk1"/>
                 </a:solidFill>
@@ -24031,7 +24175,7 @@
               </a:rPr>
               <a:t>欲しい色を実現できそうな2色のフィラメントを選定する </a:t>
             </a:r>
-            <a:endParaRPr sz="1000">
+            <a:endParaRPr sz="1000" dirty="0">
               <a:solidFill>
                 <a:schemeClr val="dk1"/>
               </a:solidFill>
@@ -24060,18 +24204,42 @@
               <a:buAutoNum type="arabicPeriod"/>
             </a:pPr>
             <a:r>
-              <a:rPr lang="en-US" sz="1000">
-                <a:solidFill>
-                  <a:schemeClr val="dk1"/>
-                </a:solidFill>
-                <a:latin typeface="IBM Plex Sans JP" panose="020B0503050203000203" pitchFamily="50" charset="-128"/>
-                <a:ea typeface="IBM Plex Sans JP" panose="020B0503050203000203" pitchFamily="50" charset="-128"/>
-                <a:cs typeface="IBM Plex Sans JP"/>
-                <a:sym typeface="IBM Plex Sans JP"/>
-              </a:rPr>
-              <a:t>1のフィラメントを用いてCheck Filament を印刷する </a:t>
-            </a:r>
-            <a:endParaRPr sz="1000">
+              <a:rPr lang="en-US" sz="1000" dirty="0">
+                <a:solidFill>
+                  <a:schemeClr val="dk1"/>
+                </a:solidFill>
+                <a:latin typeface="IBM Plex Sans JP" panose="020B0503050203000203" pitchFamily="50" charset="-128"/>
+                <a:ea typeface="IBM Plex Sans JP" panose="020B0503050203000203" pitchFamily="50" charset="-128"/>
+                <a:cs typeface="IBM Plex Sans JP"/>
+                <a:sym typeface="IBM Plex Sans JP"/>
+              </a:rPr>
+              <a:t>1のフィラメントを用いてCheck Filament </a:t>
+            </a:r>
+            <a:r>
+              <a:rPr lang="en-US" sz="1000" dirty="0" err="1">
+                <a:solidFill>
+                  <a:schemeClr val="dk1"/>
+                </a:solidFill>
+                <a:latin typeface="IBM Plex Sans JP" panose="020B0503050203000203" pitchFamily="50" charset="-128"/>
+                <a:ea typeface="IBM Plex Sans JP" panose="020B0503050203000203" pitchFamily="50" charset="-128"/>
+                <a:cs typeface="IBM Plex Sans JP"/>
+                <a:sym typeface="IBM Plex Sans JP"/>
+              </a:rPr>
+              <a:t>を印刷する</a:t>
+            </a:r>
+            <a:r>
+              <a:rPr lang="en-US" sz="1000" dirty="0">
+                <a:solidFill>
+                  <a:schemeClr val="dk1"/>
+                </a:solidFill>
+                <a:latin typeface="IBM Plex Sans JP" panose="020B0503050203000203" pitchFamily="50" charset="-128"/>
+                <a:ea typeface="IBM Plex Sans JP" panose="020B0503050203000203" pitchFamily="50" charset="-128"/>
+                <a:cs typeface="IBM Plex Sans JP"/>
+                <a:sym typeface="IBM Plex Sans JP"/>
+              </a:rPr>
+              <a:t> </a:t>
+            </a:r>
+            <a:endParaRPr sz="1000" dirty="0">
               <a:solidFill>
                 <a:schemeClr val="dk1"/>
               </a:solidFill>
@@ -24100,18 +24268,66 @@
               <a:buAutoNum type="arabicPeriod"/>
             </a:pPr>
             <a:r>
-              <a:rPr lang="en-US" sz="1000">
-                <a:solidFill>
-                  <a:schemeClr val="dk1"/>
-                </a:solidFill>
-                <a:latin typeface="IBM Plex Sans JP" panose="020B0503050203000203" pitchFamily="50" charset="-128"/>
-                <a:ea typeface="IBM Plex Sans JP" panose="020B0503050203000203" pitchFamily="50" charset="-128"/>
-                <a:cs typeface="IBM Plex Sans JP"/>
-                <a:sym typeface="IBM Plex Sans JP"/>
-              </a:rPr>
-              <a:t>Check Filament によってCheck Tower を印刷し、求める色に近いう混合比を確認する </a:t>
-            </a:r>
-            <a:endParaRPr sz="1000">
+              <a:rPr lang="en-US" sz="1000" dirty="0">
+                <a:solidFill>
+                  <a:schemeClr val="dk1"/>
+                </a:solidFill>
+                <a:latin typeface="IBM Plex Sans JP" panose="020B0503050203000203" pitchFamily="50" charset="-128"/>
+                <a:ea typeface="IBM Plex Sans JP" panose="020B0503050203000203" pitchFamily="50" charset="-128"/>
+                <a:cs typeface="IBM Plex Sans JP"/>
+                <a:sym typeface="IBM Plex Sans JP"/>
+              </a:rPr>
+              <a:t>Check Filament </a:t>
+            </a:r>
+            <a:r>
+              <a:rPr lang="en-US" sz="1000" dirty="0" err="1">
+                <a:solidFill>
+                  <a:schemeClr val="dk1"/>
+                </a:solidFill>
+                <a:latin typeface="IBM Plex Sans JP" panose="020B0503050203000203" pitchFamily="50" charset="-128"/>
+                <a:ea typeface="IBM Plex Sans JP" panose="020B0503050203000203" pitchFamily="50" charset="-128"/>
+                <a:cs typeface="IBM Plex Sans JP"/>
+                <a:sym typeface="IBM Plex Sans JP"/>
+              </a:rPr>
+              <a:t>によってCheck</a:t>
+            </a:r>
+            <a:r>
+              <a:rPr lang="en-US" sz="1000" dirty="0">
+                <a:solidFill>
+                  <a:schemeClr val="dk1"/>
+                </a:solidFill>
+                <a:latin typeface="IBM Plex Sans JP" panose="020B0503050203000203" pitchFamily="50" charset="-128"/>
+                <a:ea typeface="IBM Plex Sans JP" panose="020B0503050203000203" pitchFamily="50" charset="-128"/>
+                <a:cs typeface="IBM Plex Sans JP"/>
+                <a:sym typeface="IBM Plex Sans JP"/>
+              </a:rPr>
+              <a:t> Tower </a:t>
+            </a:r>
+            <a:r>
+              <a:rPr lang="en-US" sz="1000" dirty="0" err="1">
+                <a:solidFill>
+                  <a:schemeClr val="dk1"/>
+                </a:solidFill>
+                <a:latin typeface="IBM Plex Sans JP" panose="020B0503050203000203" pitchFamily="50" charset="-128"/>
+                <a:ea typeface="IBM Plex Sans JP" panose="020B0503050203000203" pitchFamily="50" charset="-128"/>
+                <a:cs typeface="IBM Plex Sans JP"/>
+                <a:sym typeface="IBM Plex Sans JP"/>
+              </a:rPr>
+              <a:t>を印刷し、求める色に近い混合比を確認する</a:t>
+            </a:r>
+            <a:r>
+              <a:rPr lang="en-US" sz="1000" dirty="0">
+                <a:solidFill>
+                  <a:schemeClr val="dk1"/>
+                </a:solidFill>
+                <a:latin typeface="IBM Plex Sans JP" panose="020B0503050203000203" pitchFamily="50" charset="-128"/>
+                <a:ea typeface="IBM Plex Sans JP" panose="020B0503050203000203" pitchFamily="50" charset="-128"/>
+                <a:cs typeface="IBM Plex Sans JP"/>
+                <a:sym typeface="IBM Plex Sans JP"/>
+              </a:rPr>
+              <a:t> </a:t>
+            </a:r>
+            <a:endParaRPr sz="1000" dirty="0">
               <a:solidFill>
                 <a:schemeClr val="dk1"/>
               </a:solidFill>
@@ -24140,18 +24356,30 @@
               <a:buAutoNum type="arabicPeriod"/>
             </a:pPr>
             <a:r>
-              <a:rPr lang="en-US" sz="1000">
-                <a:solidFill>
-                  <a:schemeClr val="dk1"/>
-                </a:solidFill>
-                <a:latin typeface="IBM Plex Sans JP" panose="020B0503050203000203" pitchFamily="50" charset="-128"/>
-                <a:ea typeface="IBM Plex Sans JP" panose="020B0503050203000203" pitchFamily="50" charset="-128"/>
-                <a:cs typeface="IBM Plex Sans JP"/>
-                <a:sym typeface="IBM Plex Sans JP"/>
-              </a:rPr>
-              <a:t>必要に応じ ３の混合比のS4モデルを印刷し近似形状をテストプリントする </a:t>
-            </a:r>
-            <a:endParaRPr sz="1000">
+              <a:rPr lang="en-US" sz="1000" dirty="0" err="1">
+                <a:solidFill>
+                  <a:schemeClr val="dk1"/>
+                </a:solidFill>
+                <a:latin typeface="IBM Plex Sans JP" panose="020B0503050203000203" pitchFamily="50" charset="-128"/>
+                <a:ea typeface="IBM Plex Sans JP" panose="020B0503050203000203" pitchFamily="50" charset="-128"/>
+                <a:cs typeface="IBM Plex Sans JP"/>
+                <a:sym typeface="IBM Plex Sans JP"/>
+              </a:rPr>
+              <a:t>必要に応じ</a:t>
+            </a:r>
+            <a:r>
+              <a:rPr lang="en-US" sz="1000" dirty="0">
+                <a:solidFill>
+                  <a:schemeClr val="dk1"/>
+                </a:solidFill>
+                <a:latin typeface="IBM Plex Sans JP" panose="020B0503050203000203" pitchFamily="50" charset="-128"/>
+                <a:ea typeface="IBM Plex Sans JP" panose="020B0503050203000203" pitchFamily="50" charset="-128"/>
+                <a:cs typeface="IBM Plex Sans JP"/>
+                <a:sym typeface="IBM Plex Sans JP"/>
+              </a:rPr>
+              <a:t> ３の混合比のS4モデルを印刷し近似形状をテストプリントする </a:t>
+            </a:r>
+            <a:endParaRPr sz="1000" dirty="0">
               <a:solidFill>
                 <a:schemeClr val="dk1"/>
               </a:solidFill>
@@ -24180,18 +24408,78 @@
               <a:buAutoNum type="arabicPeriod"/>
             </a:pPr>
             <a:r>
-              <a:rPr lang="en-US" sz="1000">
-                <a:solidFill>
-                  <a:schemeClr val="dk1"/>
-                </a:solidFill>
-                <a:latin typeface="IBM Plex Sans JP" panose="020B0503050203000203" pitchFamily="50" charset="-128"/>
-                <a:ea typeface="IBM Plex Sans JP" panose="020B0503050203000203" pitchFamily="50" charset="-128"/>
-                <a:cs typeface="IBM Plex Sans JP"/>
-                <a:sym typeface="IBM Plex Sans JP"/>
-              </a:rPr>
-              <a:t>問題なければ 必要量の Blend Filament を生成する </a:t>
-            </a:r>
-            <a:endParaRPr sz="1000" b="1">
+              <a:rPr lang="en-US" sz="1000" dirty="0" err="1">
+                <a:solidFill>
+                  <a:schemeClr val="dk1"/>
+                </a:solidFill>
+                <a:latin typeface="IBM Plex Sans JP" panose="020B0503050203000203" pitchFamily="50" charset="-128"/>
+                <a:ea typeface="IBM Plex Sans JP" panose="020B0503050203000203" pitchFamily="50" charset="-128"/>
+                <a:cs typeface="IBM Plex Sans JP"/>
+                <a:sym typeface="IBM Plex Sans JP"/>
+              </a:rPr>
+              <a:t>問題なければ</a:t>
+            </a:r>
+            <a:r>
+              <a:rPr lang="en-US" sz="1000" dirty="0">
+                <a:solidFill>
+                  <a:schemeClr val="dk1"/>
+                </a:solidFill>
+                <a:latin typeface="IBM Plex Sans JP" panose="020B0503050203000203" pitchFamily="50" charset="-128"/>
+                <a:ea typeface="IBM Plex Sans JP" panose="020B0503050203000203" pitchFamily="50" charset="-128"/>
+                <a:cs typeface="IBM Plex Sans JP"/>
+                <a:sym typeface="IBM Plex Sans JP"/>
+              </a:rPr>
+              <a:t> </a:t>
+            </a:r>
+            <a:r>
+              <a:rPr lang="en-US" sz="1000" dirty="0" err="1">
+                <a:solidFill>
+                  <a:schemeClr val="dk1"/>
+                </a:solidFill>
+                <a:latin typeface="IBM Plex Sans JP" panose="020B0503050203000203" pitchFamily="50" charset="-128"/>
+                <a:ea typeface="IBM Plex Sans JP" panose="020B0503050203000203" pitchFamily="50" charset="-128"/>
+                <a:cs typeface="IBM Plex Sans JP"/>
+                <a:sym typeface="IBM Plex Sans JP"/>
+              </a:rPr>
+              <a:t>必要量の</a:t>
+            </a:r>
+            <a:r>
+              <a:rPr lang="en-US" sz="1000" dirty="0">
+                <a:solidFill>
+                  <a:schemeClr val="dk1"/>
+                </a:solidFill>
+                <a:latin typeface="IBM Plex Sans JP" panose="020B0503050203000203" pitchFamily="50" charset="-128"/>
+                <a:ea typeface="IBM Plex Sans JP" panose="020B0503050203000203" pitchFamily="50" charset="-128"/>
+                <a:cs typeface="IBM Plex Sans JP"/>
+                <a:sym typeface="IBM Plex Sans JP"/>
+              </a:rPr>
+              <a:t> Blend Filament </a:t>
+            </a:r>
+            <a:r>
+              <a:rPr lang="en-US" sz="1000" dirty="0" err="1">
+                <a:solidFill>
+                  <a:schemeClr val="dk1"/>
+                </a:solidFill>
+                <a:latin typeface="IBM Plex Sans JP" panose="020B0503050203000203" pitchFamily="50" charset="-128"/>
+                <a:ea typeface="IBM Plex Sans JP" panose="020B0503050203000203" pitchFamily="50" charset="-128"/>
+                <a:cs typeface="IBM Plex Sans JP"/>
+                <a:sym typeface="IBM Plex Sans JP"/>
+              </a:rPr>
+              <a:t>を生成する</a:t>
+            </a:r>
+            <a:r>
+              <a:rPr lang="en-US" sz="1000" dirty="0">
+                <a:solidFill>
+                  <a:schemeClr val="dk1"/>
+                </a:solidFill>
+                <a:latin typeface="IBM Plex Sans JP" panose="020B0503050203000203" pitchFamily="50" charset="-128"/>
+                <a:ea typeface="IBM Plex Sans JP" panose="020B0503050203000203" pitchFamily="50" charset="-128"/>
+                <a:cs typeface="IBM Plex Sans JP"/>
+                <a:sym typeface="IBM Plex Sans JP"/>
+              </a:rPr>
+              <a:t> </a:t>
+            </a:r>
+            <a:endParaRPr sz="1000" b="1" dirty="0">
               <a:solidFill>
                 <a:schemeClr val="dk1"/>
               </a:solidFill>
